--- a/classes/parte-5-explotacion-de-sistemas-y-binarios/120-buffer-overflow-en-stack-explotacion-practica/clase-120-presentacion.pptx
+++ b/classes/parte-5-explotacion-de-sistemas-y-binarios/120-buffer-overflow-en-stack-explotacion-practica/clase-120-presentacion.pptx
@@ -17,6 +17,9 @@
     <p:sldId id="265" r:id="rId16"/>
     <p:sldId id="266" r:id="rId17"/>
     <p:sldId id="267" r:id="rId18"/>
+    <p:sldId id="268" r:id="rId19"/>
+    <p:sldId id="269" r:id="rId20"/>
+    <p:sldId id="270" r:id="rId21"/>
   </p:sldIdLst>
   <p:sldSz cx="9144000" cy="6858000" type="screen4x3"/>
   <p:notesSz cx="6858000" cy="9144000"/>
@@ -3198,7 +3201,7 @@
                   <a:srgbClr val="0B3D2E"/>
                 </a:solidFill>
               </a:rPr>
-              <a:t>⚠️ Errores comunes</a:t>
+              <a:t>✍️ Ejercicios</a:t>
             </a:r>
           </a:p>
         </p:txBody>
@@ -3236,67 +3239,82 @@
                   <a:srgbClr val="22282E"/>
                 </a:solidFill>
               </a:rPr>
-              <a:t>•  Segfault dentro de win (movaps) — Stack desalineado; añade un gadget ret extra</a:t>
-            </a:r>
-          </a:p>
-          <a:p>
-            <a:pPr>
-              <a:spcAft>
-                <a:spcPts val="600"/>
-              </a:spcAft>
-            </a:pPr>
-            <a:r>
-              <a:rPr sz="1500">
-                <a:solidFill>
-                  <a:srgbClr val="22282E"/>
-                </a:solidFill>
-              </a:rPr>
-              <a:t>•  RIP = 0x4141414141414141 — Offset correcto pero dirección mal empaquetada; usa p64</a:t>
-            </a:r>
-          </a:p>
-          <a:p>
-            <a:pPr>
-              <a:spcAft>
-                <a:spcPts val="600"/>
-              </a:spcAft>
-            </a:pPr>
-            <a:r>
-              <a:rPr sz="1500">
-                <a:solidFill>
-                  <a:srgbClr val="22282E"/>
-                </a:solidFill>
-              </a:rPr>
-              <a:t>•  RIP casi bien pero desplazado — Offset off-by-8; recuenta saved RBP</a:t>
-            </a:r>
-          </a:p>
-          <a:p>
-            <a:pPr>
-              <a:spcAft>
-                <a:spcPts val="600"/>
-              </a:spcAft>
-            </a:pPr>
-            <a:r>
-              <a:rPr sz="1500">
-                <a:solidFill>
-                  <a:srgbClr val="22282E"/>
-                </a:solidFill>
-              </a:rPr>
-              <a:t>•  Funciona en GDB pero no fuera — Diferencias de entorno/ASLR; usa env={} y desactiva ASLR</a:t>
-            </a:r>
-          </a:p>
-          <a:p>
-            <a:pPr>
-              <a:spcAft>
-                <a:spcPts val="600"/>
-              </a:spcAft>
-            </a:pPr>
-            <a:r>
-              <a:rPr sz="1500">
-                <a:solidFill>
-                  <a:srgbClr val="22282E"/>
-                </a:solidFill>
-              </a:rPr>
-              <a:t>•  EOFError en pwntools — El proceso murió antes; revisa timing con recvuntil</a:t>
+              <a:t>•  Reproduce el exploit contra el mismo binario recompilado en 32 bits (-m32, usa p32).</a:t>
+            </a:r>
+          </a:p>
+          <a:p>
+            <a:pPr>
+              <a:spcAft>
+                <a:spcPts val="600"/>
+              </a:spcAft>
+            </a:pPr>
+            <a:r>
+              <a:rPr sz="1500">
+                <a:solidFill>
+                  <a:srgbClr val="22282E"/>
+                </a:solidFill>
+              </a:rPr>
+              <a:t>•  Cambia el nombre/tamaño del buffer, recalcula el offset y adapta el script.</a:t>
+            </a:r>
+          </a:p>
+          <a:p>
+            <a:pPr>
+              <a:spcAft>
+                <a:spcPts val="600"/>
+              </a:spcAft>
+            </a:pPr>
+            <a:r>
+              <a:rPr sz="1500">
+                <a:solidFill>
+                  <a:srgbClr val="22282E"/>
+                </a:solidFill>
+              </a:rPr>
+              <a:t>•  Añade manejo con recvuntil para sincronizar con un prompt del programa.</a:t>
+            </a:r>
+          </a:p>
+          <a:p>
+            <a:pPr>
+              <a:spcAft>
+                <a:spcPts val="600"/>
+              </a:spcAft>
+            </a:pPr>
+            <a:r>
+              <a:rPr sz="1500">
+                <a:solidFill>
+                  <a:srgbClr val="22282E"/>
+                </a:solidFill>
+              </a:rPr>
+              <a:t>•  Modifica el binario para que win reciba un argumento y pásalo vía registro/stack.</a:t>
+            </a:r>
+          </a:p>
+          <a:p>
+            <a:pPr>
+              <a:spcAft>
+                <a:spcPts val="600"/>
+              </a:spcAft>
+            </a:pPr>
+            <a:r>
+              <a:rPr sz="1500">
+                <a:solidFill>
+                  <a:srgbClr val="22282E"/>
+                </a:solidFill>
+              </a:rPr>
+              <a:t>•  Explica por qué el gadget ret corrige la alineación.</a:t>
+            </a:r>
+          </a:p>
+          <a:p>
+            <a:pPr>
+              <a:spcAft>
+                <a:spcPts val="600"/>
+              </a:spcAft>
+            </a:pPr>
+            <a:r>
+              <a:rPr sz="1500">
+                <a:solidFill>
+                  <a:srgbClr val="22282E"/>
+                </a:solidFill>
+              </a:rPr>
+              <a:t>•  Convierte el exploit local a remote("127.0.0.1", 1337) sirviendo el binario con socat.</a:t>
             </a:r>
           </a:p>
         </p:txBody>
@@ -3347,7 +3365,7 @@
                   <a:srgbClr val="0B3D2E"/>
                 </a:solidFill>
               </a:rPr>
-              <a:t>❓ Preguntas frecuentes</a:t>
+              <a:t>📝 Reto verificable</a:t>
             </a:r>
           </a:p>
         </p:txBody>
@@ -3385,82 +3403,52 @@
                   <a:srgbClr val="22282E"/>
                 </a:solidFill>
               </a:rPr>
-              <a:t>•  ❓ ¿Por qué funciona en GDB y no en la terminal? GDB desactiva ASLR y añade variables de entorno</a:t>
-            </a:r>
-          </a:p>
-          <a:p>
-            <a:pPr>
-              <a:spcAft>
-                <a:spcPts val="600"/>
-              </a:spcAft>
-            </a:pPr>
-            <a:r>
-              <a:rPr sz="1500">
-                <a:solidFill>
-                  <a:srgbClr val="22282E"/>
-                </a:solidFill>
-              </a:rPr>
-              <a:t>•  que desplazan el stack. Iguala el entorno o usa direcciones estables (-no-pie).</a:t>
-            </a:r>
-          </a:p>
-          <a:p>
-            <a:pPr>
-              <a:spcAft>
-                <a:spcPts val="600"/>
-              </a:spcAft>
-            </a:pPr>
-            <a:r>
-              <a:rPr sz="1500">
-                <a:solidFill>
-                  <a:srgbClr val="22282E"/>
-                </a:solidFill>
-              </a:rPr>
-              <a:t>•  ❓ ¿Necesito shellcode aquí? No: ret2win reutiliza una función existente. El shellcode llega en la</a:t>
-            </a:r>
-          </a:p>
-          <a:p>
-            <a:pPr>
-              <a:spcAft>
-                <a:spcPts val="600"/>
-              </a:spcAft>
-            </a:pPr>
-            <a:r>
-              <a:rPr sz="1500">
-                <a:solidFill>
-                  <a:srgbClr val="22282E"/>
-                </a:solidFill>
-              </a:rPr>
-              <a:t>•  clase 121.</a:t>
-            </a:r>
-          </a:p>
-          <a:p>
-            <a:pPr>
-              <a:spcAft>
-                <a:spcPts val="600"/>
-              </a:spcAft>
-            </a:pPr>
-            <a:r>
-              <a:rPr sz="1500">
-                <a:solidFill>
-                  <a:srgbClr val="22282E"/>
-                </a:solidFill>
-              </a:rPr>
-              <a:t>•  ❓ ¿Y si el binario tiene canary? El payload lineal se detecta; hay que filtrarlo primero</a:t>
-            </a:r>
-          </a:p>
-          <a:p>
-            <a:pPr>
-              <a:spcAft>
-                <a:spcPts val="600"/>
-              </a:spcAft>
-            </a:pPr>
-            <a:r>
-              <a:rPr sz="1500">
-                <a:solidFill>
-                  <a:srgbClr val="22282E"/>
-                </a:solidFill>
-              </a:rPr>
-              <a:t>•  (clases 122-123).</a:t>
+              <a:t>•  Entrega exploit.py que, contra tu binario vuln, imprima la salida de win() de forma fiable en</a:t>
+            </a:r>
+          </a:p>
+          <a:p>
+            <a:pPr>
+              <a:spcAft>
+                <a:spcPts val="600"/>
+              </a:spcAft>
+            </a:pPr>
+            <a:r>
+              <a:rPr sz="1500">
+                <a:solidFill>
+                  <a:srgbClr val="22282E"/>
+                </a:solidFill>
+              </a:rPr>
+              <a:t>•  al menos 5 ejecuciones seguidas.</a:t>
+            </a:r>
+          </a:p>
+          <a:p>
+            <a:pPr>
+              <a:spcAft>
+                <a:spcPts val="600"/>
+              </a:spcAft>
+            </a:pPr>
+            <a:r>
+              <a:rPr sz="1500">
+                <a:solidFill>
+                  <a:srgbClr val="22282E"/>
+                </a:solidFill>
+              </a:rPr>
+              <a:t>•  Criterio de aceptación: for i in $(seq 5); do python3 exploit.py; done muestra el mensaje de</a:t>
+            </a:r>
+          </a:p>
+          <a:p>
+            <a:pPr>
+              <a:spcAft>
+                <a:spcPts val="600"/>
+              </a:spcAft>
+            </a:pPr>
+            <a:r>
+              <a:rPr sz="1500">
+                <a:solidFill>
+                  <a:srgbClr val="22282E"/>
+                </a:solidFill>
+              </a:rPr>
+              <a:t>•  win() las 5 veces, sin segfaults.</a:t>
             </a:r>
           </a:p>
         </p:txBody>
@@ -3511,7 +3499,7 @@
                   <a:srgbClr val="0B3D2E"/>
                 </a:solidFill>
               </a:rPr>
-              <a:t>🔗 Referencias</a:t>
+              <a:t>⚠️ Errores comunes</a:t>
             </a:r>
           </a:p>
         </p:txBody>
@@ -3549,6 +3537,319 @@
                   <a:srgbClr val="22282E"/>
                 </a:solidFill>
               </a:rPr>
+              <a:t>•  Segfault dentro de win (movaps) — Stack desalineado; añade un gadget ret extra</a:t>
+            </a:r>
+          </a:p>
+          <a:p>
+            <a:pPr>
+              <a:spcAft>
+                <a:spcPts val="600"/>
+              </a:spcAft>
+            </a:pPr>
+            <a:r>
+              <a:rPr sz="1500">
+                <a:solidFill>
+                  <a:srgbClr val="22282E"/>
+                </a:solidFill>
+              </a:rPr>
+              <a:t>•  RIP = 0x4141414141414141 — Offset correcto pero dirección mal empaquetada; usa p64</a:t>
+            </a:r>
+          </a:p>
+          <a:p>
+            <a:pPr>
+              <a:spcAft>
+                <a:spcPts val="600"/>
+              </a:spcAft>
+            </a:pPr>
+            <a:r>
+              <a:rPr sz="1500">
+                <a:solidFill>
+                  <a:srgbClr val="22282E"/>
+                </a:solidFill>
+              </a:rPr>
+              <a:t>•  RIP casi bien pero desplazado — Offset off-by-8; recuenta saved RBP</a:t>
+            </a:r>
+          </a:p>
+          <a:p>
+            <a:pPr>
+              <a:spcAft>
+                <a:spcPts val="600"/>
+              </a:spcAft>
+            </a:pPr>
+            <a:r>
+              <a:rPr sz="1500">
+                <a:solidFill>
+                  <a:srgbClr val="22282E"/>
+                </a:solidFill>
+              </a:rPr>
+              <a:t>•  Funciona en GDB pero no fuera — Diferencias de entorno/ASLR; usa env={} y desactiva ASLR</a:t>
+            </a:r>
+          </a:p>
+          <a:p>
+            <a:pPr>
+              <a:spcAft>
+                <a:spcPts val="600"/>
+              </a:spcAft>
+            </a:pPr>
+            <a:r>
+              <a:rPr sz="1500">
+                <a:solidFill>
+                  <a:srgbClr val="22282E"/>
+                </a:solidFill>
+              </a:rPr>
+              <a:t>•  EOFError en pwntools — El proceso murió antes; revisa timing con recvuntil</a:t>
+            </a:r>
+          </a:p>
+        </p:txBody>
+      </p:sp>
+    </p:spTree>
+  </p:cSld>
+  <p:clrMapOvr>
+    <a:masterClrMapping/>
+  </p:clrMapOvr>
+</p:sld>
+</file>
+
+<file path=ppt/slides/slide13.xml><?xml version="1.0" encoding="utf-8"?>
+<p:sld xmlns:a="http://schemas.openxmlformats.org/drawingml/2006/main" xmlns:p="http://schemas.openxmlformats.org/presentationml/2006/main" xmlns:r="http://schemas.openxmlformats.org/officeDocument/2006/relationships">
+  <p:cSld>
+    <p:spTree>
+      <p:nvGrpSpPr>
+        <p:cNvPr id="1" name=""/>
+        <p:cNvGrpSpPr/>
+        <p:nvPr/>
+      </p:nvGrpSpPr>
+      <p:grpSpPr/>
+      <p:sp>
+        <p:nvSpPr>
+          <p:cNvPr id="2" name="TextBox 1"/>
+          <p:cNvSpPr txBox="1"/>
+          <p:nvPr/>
+        </p:nvSpPr>
+        <p:spPr>
+          <a:xfrm>
+            <a:off x="457200" y="320040"/>
+            <a:ext cx="8229600" cy="822960"/>
+          </a:xfrm>
+          <a:prstGeom prst="rect">
+            <a:avLst/>
+          </a:prstGeom>
+          <a:noFill/>
+        </p:spPr>
+        <p:txBody>
+          <a:bodyPr wrap="square">
+            <a:spAutoFit/>
+          </a:bodyPr>
+          <a:lstStyle/>
+          <a:p>
+            <a:r>
+              <a:rPr sz="2600" b="1">
+                <a:solidFill>
+                  <a:srgbClr val="0B3D2E"/>
+                </a:solidFill>
+              </a:rPr>
+              <a:t>❓ Preguntas frecuentes</a:t>
+            </a:r>
+          </a:p>
+        </p:txBody>
+      </p:sp>
+      <p:sp>
+        <p:nvSpPr>
+          <p:cNvPr id="3" name="TextBox 2"/>
+          <p:cNvSpPr txBox="1"/>
+          <p:nvPr/>
+        </p:nvSpPr>
+        <p:spPr>
+          <a:xfrm>
+            <a:off x="457200" y="1280160"/>
+            <a:ext cx="8229600" cy="4937760"/>
+          </a:xfrm>
+          <a:prstGeom prst="rect">
+            <a:avLst/>
+          </a:prstGeom>
+          <a:noFill/>
+        </p:spPr>
+        <p:txBody>
+          <a:bodyPr wrap="square">
+            <a:spAutoFit/>
+          </a:bodyPr>
+          <a:lstStyle/>
+          <a:p>
+            <a:pPr>
+              <a:spcAft>
+                <a:spcPts val="600"/>
+              </a:spcAft>
+            </a:pPr>
+            <a:r>
+              <a:rPr sz="1500">
+                <a:solidFill>
+                  <a:srgbClr val="22282E"/>
+                </a:solidFill>
+              </a:rPr>
+              <a:t>•  ❓ ¿Por qué funciona en GDB y no en la terminal? GDB desactiva ASLR y añade variables de entorno</a:t>
+            </a:r>
+          </a:p>
+          <a:p>
+            <a:pPr>
+              <a:spcAft>
+                <a:spcPts val="600"/>
+              </a:spcAft>
+            </a:pPr>
+            <a:r>
+              <a:rPr sz="1500">
+                <a:solidFill>
+                  <a:srgbClr val="22282E"/>
+                </a:solidFill>
+              </a:rPr>
+              <a:t>•  que desplazan el stack. Iguala el entorno o usa direcciones estables (-no-pie).</a:t>
+            </a:r>
+          </a:p>
+          <a:p>
+            <a:pPr>
+              <a:spcAft>
+                <a:spcPts val="600"/>
+              </a:spcAft>
+            </a:pPr>
+            <a:r>
+              <a:rPr sz="1500">
+                <a:solidFill>
+                  <a:srgbClr val="22282E"/>
+                </a:solidFill>
+              </a:rPr>
+              <a:t>•  ❓ ¿Necesito shellcode aquí? No: ret2win reutiliza una función existente. El shellcode llega en la</a:t>
+            </a:r>
+          </a:p>
+          <a:p>
+            <a:pPr>
+              <a:spcAft>
+                <a:spcPts val="600"/>
+              </a:spcAft>
+            </a:pPr>
+            <a:r>
+              <a:rPr sz="1500">
+                <a:solidFill>
+                  <a:srgbClr val="22282E"/>
+                </a:solidFill>
+              </a:rPr>
+              <a:t>•  clase 121.</a:t>
+            </a:r>
+          </a:p>
+          <a:p>
+            <a:pPr>
+              <a:spcAft>
+                <a:spcPts val="600"/>
+              </a:spcAft>
+            </a:pPr>
+            <a:r>
+              <a:rPr sz="1500">
+                <a:solidFill>
+                  <a:srgbClr val="22282E"/>
+                </a:solidFill>
+              </a:rPr>
+              <a:t>•  ❓ ¿Y si el binario tiene canary? El payload lineal se detecta; hay que filtrarlo primero</a:t>
+            </a:r>
+          </a:p>
+          <a:p>
+            <a:pPr>
+              <a:spcAft>
+                <a:spcPts val="600"/>
+              </a:spcAft>
+            </a:pPr>
+            <a:r>
+              <a:rPr sz="1500">
+                <a:solidFill>
+                  <a:srgbClr val="22282E"/>
+                </a:solidFill>
+              </a:rPr>
+              <a:t>•  (clases 122-123).</a:t>
+            </a:r>
+          </a:p>
+        </p:txBody>
+      </p:sp>
+    </p:spTree>
+  </p:cSld>
+  <p:clrMapOvr>
+    <a:masterClrMapping/>
+  </p:clrMapOvr>
+</p:sld>
+</file>
+
+<file path=ppt/slides/slide14.xml><?xml version="1.0" encoding="utf-8"?>
+<p:sld xmlns:a="http://schemas.openxmlformats.org/drawingml/2006/main" xmlns:p="http://schemas.openxmlformats.org/presentationml/2006/main" xmlns:r="http://schemas.openxmlformats.org/officeDocument/2006/relationships">
+  <p:cSld>
+    <p:spTree>
+      <p:nvGrpSpPr>
+        <p:cNvPr id="1" name=""/>
+        <p:cNvGrpSpPr/>
+        <p:nvPr/>
+      </p:nvGrpSpPr>
+      <p:grpSpPr/>
+      <p:sp>
+        <p:nvSpPr>
+          <p:cNvPr id="2" name="TextBox 1"/>
+          <p:cNvSpPr txBox="1"/>
+          <p:nvPr/>
+        </p:nvSpPr>
+        <p:spPr>
+          <a:xfrm>
+            <a:off x="457200" y="320040"/>
+            <a:ext cx="8229600" cy="822960"/>
+          </a:xfrm>
+          <a:prstGeom prst="rect">
+            <a:avLst/>
+          </a:prstGeom>
+          <a:noFill/>
+        </p:spPr>
+        <p:txBody>
+          <a:bodyPr wrap="square">
+            <a:spAutoFit/>
+          </a:bodyPr>
+          <a:lstStyle/>
+          <a:p>
+            <a:r>
+              <a:rPr sz="2600" b="1">
+                <a:solidFill>
+                  <a:srgbClr val="0B3D2E"/>
+                </a:solidFill>
+              </a:rPr>
+              <a:t>🔗 Referencias</a:t>
+            </a:r>
+          </a:p>
+        </p:txBody>
+      </p:sp>
+      <p:sp>
+        <p:nvSpPr>
+          <p:cNvPr id="3" name="TextBox 2"/>
+          <p:cNvSpPr txBox="1"/>
+          <p:nvPr/>
+        </p:nvSpPr>
+        <p:spPr>
+          <a:xfrm>
+            <a:off x="457200" y="1280160"/>
+            <a:ext cx="8229600" cy="4937760"/>
+          </a:xfrm>
+          <a:prstGeom prst="rect">
+            <a:avLst/>
+          </a:prstGeom>
+          <a:noFill/>
+        </p:spPr>
+        <p:txBody>
+          <a:bodyPr wrap="square">
+            <a:spAutoFit/>
+          </a:bodyPr>
+          <a:lstStyle/>
+          <a:p>
+            <a:pPr>
+              <a:spcAft>
+                <a:spcPts val="600"/>
+              </a:spcAft>
+            </a:pPr>
+            <a:r>
+              <a:rPr sz="1500">
+                <a:solidFill>
+                  <a:srgbClr val="22282E"/>
+                </a:solidFill>
+              </a:rPr>
               <a:t>•  pwntools docs — &lt;https://docs.pwntools.com/&gt;</a:t>
             </a:r>
           </a:p>
@@ -3599,6 +3900,81 @@
           </a:p>
         </p:txBody>
       </p:sp>
+    </p:spTree>
+  </p:cSld>
+  <p:clrMapOvr>
+    <a:masterClrMapping/>
+  </p:clrMapOvr>
+</p:sld>
+</file>
+
+<file path=ppt/slides/slide15.xml><?xml version="1.0" encoding="utf-8"?>
+<p:sld xmlns:a="http://schemas.openxmlformats.org/drawingml/2006/main" xmlns:p="http://schemas.openxmlformats.org/presentationml/2006/main" xmlns:r="http://schemas.openxmlformats.org/officeDocument/2006/relationships">
+  <p:cSld>
+    <p:spTree>
+      <p:nvGrpSpPr>
+        <p:cNvPr id="1" name=""/>
+        <p:cNvGrpSpPr/>
+        <p:nvPr/>
+      </p:nvGrpSpPr>
+      <p:grpSpPr/>
+      <p:sp>
+        <p:nvSpPr>
+          <p:cNvPr id="2" name="TextBox 1"/>
+          <p:cNvSpPr txBox="1"/>
+          <p:nvPr/>
+        </p:nvSpPr>
+        <p:spPr>
+          <a:xfrm>
+            <a:off x="457200" y="274320"/>
+            <a:ext cx="8229600" cy="640080"/>
+          </a:xfrm>
+          <a:prstGeom prst="rect">
+            <a:avLst/>
+          </a:prstGeom>
+          <a:noFill/>
+        </p:spPr>
+        <p:txBody>
+          <a:bodyPr wrap="square">
+            <a:spAutoFit/>
+          </a:bodyPr>
+          <a:lstStyle/>
+          <a:p>
+            <a:r>
+              <a:rPr sz="2200" b="1">
+                <a:solidFill>
+                  <a:srgbClr val="0B3D2E"/>
+                </a:solidFill>
+              </a:rPr>
+              <a:t>Diagrama de la clase</a:t>
+            </a:r>
+          </a:p>
+        </p:txBody>
+      </p:sp>
+      <p:pic>
+        <p:nvPicPr>
+          <p:cNvPr id="3" name="Picture 2" descr="51509f2af4f36d14.png"/>
+          <p:cNvPicPr>
+            <a:picLocks noChangeAspect="1"/>
+          </p:cNvPicPr>
+          <p:nvPr/>
+        </p:nvPicPr>
+        <p:blipFill>
+          <a:blip r:embed="rId2"/>
+          <a:stretch>
+            <a:fillRect/>
+          </a:stretch>
+        </p:blipFill>
+        <p:spPr>
+          <a:xfrm>
+            <a:off x="457200" y="3017520"/>
+            <a:ext cx="8229600" cy="1463040"/>
+          </a:xfrm>
+          <a:prstGeom prst="rect">
+            <a:avLst/>
+          </a:prstGeom>
+        </p:spPr>
+      </p:pic>
     </p:spTree>
   </p:cSld>
   <p:clrMapOvr>
@@ -4122,7 +4498,7 @@
                   <a:srgbClr val="0B3D2E"/>
                 </a:solidFill>
               </a:rPr>
-              <a:t>📖 Definiciones y características</a:t>
+              <a:t>🧠 Explicación en profundidad</a:t>
             </a:r>
           </a:p>
         </p:txBody>
@@ -4160,97 +4536,97 @@
                   <a:srgbClr val="22282E"/>
                 </a:solidFill>
               </a:rPr>
-              <a:t>•  Payload: secuencia de bytes que envías al programa para explotarlo. Clave: aquí es</a:t>
-            </a:r>
-          </a:p>
-          <a:p>
-            <a:pPr>
-              <a:spcAft>
-                <a:spcPts val="600"/>
-              </a:spcAft>
-            </a:pPr>
-            <a:r>
-              <a:rPr sz="1500">
-                <a:solidFill>
-                  <a:srgbClr val="22282E"/>
-                </a:solidFill>
-              </a:rPr>
-              <a:t>•  b"A"offset + p64(dirobjetivo).</a:t>
-            </a:r>
-          </a:p>
-          <a:p>
-            <a:pPr>
-              <a:spcAft>
-                <a:spcPts val="600"/>
-              </a:spcAft>
-            </a:pPr>
-            <a:r>
-              <a:rPr sz="1500">
-                <a:solidFill>
-                  <a:srgbClr val="22282E"/>
-                </a:solidFill>
-              </a:rPr>
-              <a:t>•  ret2win: técnica didáctica que salta a una función ganadora ya presente en el binario. Clave:</a:t>
-            </a:r>
-          </a:p>
-          <a:p>
-            <a:pPr>
-              <a:spcAft>
-                <a:spcPts val="600"/>
-              </a:spcAft>
-            </a:pPr>
-            <a:r>
-              <a:rPr sz="1500">
-                <a:solidFill>
-                  <a:srgbClr val="22282E"/>
-                </a:solidFill>
-              </a:rPr>
-              <a:t>•  no necesita shellcode ni bypass de NX.</a:t>
-            </a:r>
-          </a:p>
-          <a:p>
-            <a:pPr>
-              <a:spcAft>
-                <a:spcPts val="600"/>
-              </a:spcAft>
-            </a:pPr>
-            <a:r>
-              <a:rPr sz="1500">
-                <a:solidFill>
-                  <a:srgbClr val="22282E"/>
-                </a:solidFill>
-              </a:rPr>
-              <a:t>•  p64/p32: funciones de pwntools que empaquetan un entero en little-endian. Clave: evitan</a:t>
-            </a:r>
-          </a:p>
-          <a:p>
-            <a:pPr>
-              <a:spcAft>
-                <a:spcPts val="600"/>
-              </a:spcAft>
-            </a:pPr>
-            <a:r>
-              <a:rPr sz="1500">
-                <a:solidFill>
-                  <a:srgbClr val="22282E"/>
-                </a:solidFill>
-              </a:rPr>
-              <a:t>•  errores manuales de orden de bytes.</a:t>
-            </a:r>
-          </a:p>
-          <a:p>
-            <a:pPr>
-              <a:spcAft>
-                <a:spcPts val="600"/>
-              </a:spcAft>
-            </a:pPr>
-            <a:r>
-              <a:rPr sz="1500">
-                <a:solidFill>
-                  <a:srgbClr val="22282E"/>
-                </a:solidFill>
-              </a:rPr>
-              <a:t>•  Alineación de stack: System V exige RSP múltiplo de 16 antes de un call. Clave: si falla,</a:t>
+              <a:t>•  Esta clase materializa el buffer overflow de la anterior en un exploit funcional contra un binario</a:t>
+            </a:r>
+          </a:p>
+          <a:p>
+            <a:pPr>
+              <a:spcAft>
+                <a:spcPts val="600"/>
+              </a:spcAft>
+            </a:pPr>
+            <a:r>
+              <a:rPr sz="1500">
+                <a:solidFill>
+                  <a:srgbClr val="22282E"/>
+                </a:solidFill>
+              </a:rPr>
+              <a:t>•  sencillo —típicamente sin las mitigaciones modernas, para aislar la técnica—. El flujo de trabajo es</a:t>
+            </a:r>
+          </a:p>
+          <a:p>
+            <a:pPr>
+              <a:spcAft>
+                <a:spcPts val="600"/>
+              </a:spcAft>
+            </a:pPr>
+            <a:r>
+              <a:rPr sz="1500">
+                <a:solidFill>
+                  <a:srgbClr val="22282E"/>
+                </a:solidFill>
+              </a:rPr>
+              <a:t>•  metódico y se repite en casi todos los retos de pwn: medir el offset, construir el payload,</a:t>
+            </a:r>
+          </a:p>
+          <a:p>
+            <a:pPr>
+              <a:spcAft>
+                <a:spcPts val="600"/>
+              </a:spcAft>
+            </a:pPr>
+            <a:r>
+              <a:rPr sz="1500">
+                <a:solidFill>
+                  <a:srgbClr val="22282E"/>
+                </a:solidFill>
+              </a:rPr>
+              <a:t>•  sobrescribir la dirección de retorno con la dirección deseada, y verificar. El objetivo pedagógico</a:t>
+            </a:r>
+          </a:p>
+          <a:p>
+            <a:pPr>
+              <a:spcAft>
+                <a:spcPts val="600"/>
+              </a:spcAft>
+            </a:pPr>
+            <a:r>
+              <a:rPr sz="1500">
+                <a:solidFill>
+                  <a:srgbClr val="22282E"/>
+                </a:solidFill>
+              </a:rPr>
+              <a:t>•  clásico es ret2win: el binario contiene una función "ganadora" (que imprime la flag o lanza una</a:t>
+            </a:r>
+          </a:p>
+          <a:p>
+            <a:pPr>
+              <a:spcAft>
+                <a:spcPts val="600"/>
+              </a:spcAft>
+            </a:pPr>
+            <a:r>
+              <a:rPr sz="1500">
+                <a:solidFill>
+                  <a:srgbClr val="22282E"/>
+                </a:solidFill>
+              </a:rPr>
+              <a:t>•  shell) que nunca se llama, y el exploit consiste en desbordar y redirigir RIP a esa función.</a:t>
+            </a:r>
+          </a:p>
+          <a:p>
+            <a:pPr>
+              <a:spcAft>
+                <a:spcPts val="600"/>
+              </a:spcAft>
+            </a:pPr>
+            <a:r>
+              <a:rPr sz="1500">
+                <a:solidFill>
+                  <a:srgbClr val="22282E"/>
+                </a:solidFill>
+              </a:rPr>
+              <a:t>•  Con el offset ya medido (cyclic, Clase 118), el payload tiene una estructura simple: offset</a:t>
             </a:r>
           </a:p>
         </p:txBody>
@@ -4301,7 +4677,7 @@
                   <a:srgbClr val="0B3D2E"/>
                 </a:solidFill>
               </a:rPr>
-              <a:t>🧰 Herramientas y preparación</a:t>
+              <a:t>📖 Definiciones y características</a:t>
             </a:r>
           </a:p>
         </p:txBody>
@@ -4339,37 +4715,97 @@
                   <a:srgbClr val="22282E"/>
                 </a:solidFill>
               </a:rPr>
-              <a:t>•  pip install pwntools</a:t>
-            </a:r>
-          </a:p>
-          <a:p>
-            <a:pPr>
-              <a:spcAft>
-                <a:spcPts val="600"/>
-              </a:spcAft>
-            </a:pPr>
-            <a:r>
-              <a:rPr sz="1500">
-                <a:solidFill>
-                  <a:srgbClr val="22282E"/>
-                </a:solidFill>
-              </a:rPr>
-              <a:t>•  python3 -c "import pwn; print(pwn.version)"</a:t>
-            </a:r>
-          </a:p>
-          <a:p>
-            <a:pPr>
-              <a:spcAft>
-                <a:spcPts val="600"/>
-              </a:spcAft>
-            </a:pPr>
-            <a:r>
-              <a:rPr sz="1500">
-                <a:solidFill>
-                  <a:srgbClr val="22282E"/>
-                </a:solidFill>
-              </a:rPr>
-              <a:t>•  Usa el vuln de las clases 118-119 (compilado con -fno-stack-protector -no-pie).</a:t>
+              <a:t>•  Payload: secuencia de bytes que envías al programa para explotarlo. Clave: aquí es</a:t>
+            </a:r>
+          </a:p>
+          <a:p>
+            <a:pPr>
+              <a:spcAft>
+                <a:spcPts val="600"/>
+              </a:spcAft>
+            </a:pPr>
+            <a:r>
+              <a:rPr sz="1500">
+                <a:solidFill>
+                  <a:srgbClr val="22282E"/>
+                </a:solidFill>
+              </a:rPr>
+              <a:t>•  b"A"offset + p64(dirobjetivo).</a:t>
+            </a:r>
+          </a:p>
+          <a:p>
+            <a:pPr>
+              <a:spcAft>
+                <a:spcPts val="600"/>
+              </a:spcAft>
+            </a:pPr>
+            <a:r>
+              <a:rPr sz="1500">
+                <a:solidFill>
+                  <a:srgbClr val="22282E"/>
+                </a:solidFill>
+              </a:rPr>
+              <a:t>•  ret2win: técnica didáctica que salta a una función ganadora ya presente en el binario. Clave:</a:t>
+            </a:r>
+          </a:p>
+          <a:p>
+            <a:pPr>
+              <a:spcAft>
+                <a:spcPts val="600"/>
+              </a:spcAft>
+            </a:pPr>
+            <a:r>
+              <a:rPr sz="1500">
+                <a:solidFill>
+                  <a:srgbClr val="22282E"/>
+                </a:solidFill>
+              </a:rPr>
+              <a:t>•  no necesita shellcode ni bypass de NX.</a:t>
+            </a:r>
+          </a:p>
+          <a:p>
+            <a:pPr>
+              <a:spcAft>
+                <a:spcPts val="600"/>
+              </a:spcAft>
+            </a:pPr>
+            <a:r>
+              <a:rPr sz="1500">
+                <a:solidFill>
+                  <a:srgbClr val="22282E"/>
+                </a:solidFill>
+              </a:rPr>
+              <a:t>•  p64/p32: funciones de pwntools que empaquetan un entero en little-endian. Clave: evitan</a:t>
+            </a:r>
+          </a:p>
+          <a:p>
+            <a:pPr>
+              <a:spcAft>
+                <a:spcPts val="600"/>
+              </a:spcAft>
+            </a:pPr>
+            <a:r>
+              <a:rPr sz="1500">
+                <a:solidFill>
+                  <a:srgbClr val="22282E"/>
+                </a:solidFill>
+              </a:rPr>
+              <a:t>•  errores manuales de orden de bytes.</a:t>
+            </a:r>
+          </a:p>
+          <a:p>
+            <a:pPr>
+              <a:spcAft>
+                <a:spcPts val="600"/>
+              </a:spcAft>
+            </a:pPr>
+            <a:r>
+              <a:rPr sz="1500">
+                <a:solidFill>
+                  <a:srgbClr val="22282E"/>
+                </a:solidFill>
+              </a:rPr>
+              <a:t>•  Alineación de stack: System V exige RSP múltiplo de 16 antes de un call. Clave: si falla,</a:t>
             </a:r>
           </a:p>
         </p:txBody>
@@ -4420,7 +4856,7 @@
                   <a:srgbClr val="0B3D2E"/>
                 </a:solidFill>
               </a:rPr>
-              <a:t>🧪 Laboratorio guiado</a:t>
+              <a:t>📔 Glosario</a:t>
             </a:r>
           </a:p>
         </p:txBody>
@@ -4458,97 +4894,97 @@
                   <a:srgbClr val="22282E"/>
                 </a:solidFill>
               </a:rPr>
-              <a:t>•  Confirma el offset con pwndbg (cyclic 200 → cyclic -l &lt;valor&gt;). Supón que es 72.</a:t>
-            </a:r>
-          </a:p>
-          <a:p>
-            <a:pPr>
-              <a:spcAft>
-                <a:spcPts val="600"/>
-              </a:spcAft>
-            </a:pPr>
-            <a:r>
-              <a:rPr sz="1500">
-                <a:solidFill>
-                  <a:srgbClr val="22282E"/>
-                </a:solidFill>
-              </a:rPr>
-              <a:t>•  Averigua la dirección de win: objdump -d vuln | grep '&lt;win&gt;:' o en pwntools elf.symbols.win.</a:t>
-            </a:r>
-          </a:p>
-          <a:p>
-            <a:pPr>
-              <a:spcAft>
-                <a:spcPts val="600"/>
-              </a:spcAft>
-            </a:pPr>
-            <a:r>
-              <a:rPr sz="1500">
-                <a:solidFill>
-                  <a:srgbClr val="22282E"/>
-                </a:solidFill>
-              </a:rPr>
-              <a:t>•  Prueba el payload manual:</a:t>
-            </a:r>
-          </a:p>
-          <a:p>
-            <a:pPr>
-              <a:spcAft>
-                <a:spcPts val="600"/>
-              </a:spcAft>
-            </a:pPr>
-            <a:r>
-              <a:rPr sz="1500">
-                <a:solidFill>
-                  <a:srgbClr val="22282E"/>
-                </a:solidFill>
-              </a:rPr>
-              <a:t>•  python3 -c 'import sys;sys.stdout.buffer.write(b"A"72 + (0x401156).tobytes(8,"little"))' | ./vuln</a:t>
-            </a:r>
-          </a:p>
-          <a:p>
-            <a:pPr>
-              <a:spcAft>
-                <a:spcPts val="600"/>
-              </a:spcAft>
-            </a:pPr>
-            <a:r>
-              <a:rPr sz="1500">
-                <a:solidFill>
-                  <a:srgbClr val="22282E"/>
-                </a:solidFill>
-              </a:rPr>
-              <a:t>•  Escríbelo en pwntools (exploit.py):</a:t>
-            </a:r>
-          </a:p>
-          <a:p>
-            <a:pPr>
-              <a:spcAft>
-                <a:spcPts val="600"/>
-              </a:spcAft>
-            </a:pPr>
-            <a:r>
-              <a:rPr sz="1500">
-                <a:solidFill>
-                  <a:srgbClr val="22282E"/>
-                </a:solidFill>
-              </a:rPr>
-              <a:t>•  from pwn import</a:t>
-            </a:r>
-          </a:p>
-          <a:p>
-            <a:pPr>
-              <a:spcAft>
-                <a:spcPts val="600"/>
-              </a:spcAft>
-            </a:pPr>
-            <a:r>
-              <a:rPr sz="1500">
-                <a:solidFill>
-                  <a:srgbClr val="22282E"/>
-                </a:solidFill>
-              </a:rPr>
-              <a:t>•  context.binary = elf = ELF("./vuln")</a:t>
+              <a:t>•  Término — Definición concisa</a:t>
+            </a:r>
+          </a:p>
+          <a:p>
+            <a:pPr>
+              <a:spcAft>
+                <a:spcPts val="600"/>
+              </a:spcAft>
+            </a:pPr>
+            <a:r>
+              <a:rPr sz="1500">
+                <a:solidFill>
+                  <a:srgbClr val="22282E"/>
+                </a:solidFill>
+              </a:rPr>
+              <a:t>•  ret2win — Redirigir RIP a una función "ganadora" del propio binario</a:t>
+            </a:r>
+          </a:p>
+          <a:p>
+            <a:pPr>
+              <a:spcAft>
+                <a:spcPts val="600"/>
+              </a:spcAft>
+            </a:pPr>
+            <a:r>
+              <a:rPr sz="1500">
+                <a:solidFill>
+                  <a:srgbClr val="22282E"/>
+                </a:solidFill>
+              </a:rPr>
+              <a:t>•  Recolección del offset — Medir la distancia a RIP con cyclic</a:t>
+            </a:r>
+          </a:p>
+          <a:p>
+            <a:pPr>
+              <a:spcAft>
+                <a:spcPts val="600"/>
+              </a:spcAft>
+            </a:pPr>
+            <a:r>
+              <a:rPr sz="1500">
+                <a:solidFill>
+                  <a:srgbClr val="22282E"/>
+                </a:solidFill>
+              </a:rPr>
+              <a:t>•  Payload — Relleno + dirección de destino en little-endian</a:t>
+            </a:r>
+          </a:p>
+          <a:p>
+            <a:pPr>
+              <a:spcAft>
+                <a:spcPts val="600"/>
+              </a:spcAft>
+            </a:pPr>
+            <a:r>
+              <a:rPr sz="1500">
+                <a:solidFill>
+                  <a:srgbClr val="22282E"/>
+                </a:solidFill>
+              </a:rPr>
+              <a:t>•  Relleno (padding) — Bytes de relación hasta la dirección de retorno</a:t>
+            </a:r>
+          </a:p>
+          <a:p>
+            <a:pPr>
+              <a:spcAft>
+                <a:spcPts val="600"/>
+              </a:spcAft>
+            </a:pPr>
+            <a:r>
+              <a:rPr sz="1500">
+                <a:solidFill>
+                  <a:srgbClr val="22282E"/>
+                </a:solidFill>
+              </a:rPr>
+              <a:t>•  p64 / p32 — Empaquetan una dirección en bytes little-endian</a:t>
+            </a:r>
+          </a:p>
+          <a:p>
+            <a:pPr>
+              <a:spcAft>
+                <a:spcPts val="600"/>
+              </a:spcAft>
+            </a:pPr>
+            <a:r>
+              <a:rPr sz="1500">
+                <a:solidFill>
+                  <a:srgbClr val="22282E"/>
+                </a:solidFill>
+              </a:rPr>
+              <a:t>•  pwntools — Librería de Python para construir y lanzar exploits</a:t>
             </a:r>
           </a:p>
         </p:txBody>
@@ -4599,7 +5035,7 @@
                   <a:srgbClr val="0B3D2E"/>
                 </a:solidFill>
               </a:rPr>
-              <a:t>✍️ Ejercicios</a:t>
+              <a:t>🧰 Herramientas y preparación</a:t>
             </a:r>
           </a:p>
         </p:txBody>
@@ -4637,82 +5073,7 @@
                   <a:srgbClr val="22282E"/>
                 </a:solidFill>
               </a:rPr>
-              <a:t>•  Reproduce el exploit contra el mismo binario recompilado en 32 bits (-m32, usa p32).</a:t>
-            </a:r>
-          </a:p>
-          <a:p>
-            <a:pPr>
-              <a:spcAft>
-                <a:spcPts val="600"/>
-              </a:spcAft>
-            </a:pPr>
-            <a:r>
-              <a:rPr sz="1500">
-                <a:solidFill>
-                  <a:srgbClr val="22282E"/>
-                </a:solidFill>
-              </a:rPr>
-              <a:t>•  Cambia el nombre/tamaño del buffer, recalcula el offset y adapta el script.</a:t>
-            </a:r>
-          </a:p>
-          <a:p>
-            <a:pPr>
-              <a:spcAft>
-                <a:spcPts val="600"/>
-              </a:spcAft>
-            </a:pPr>
-            <a:r>
-              <a:rPr sz="1500">
-                <a:solidFill>
-                  <a:srgbClr val="22282E"/>
-                </a:solidFill>
-              </a:rPr>
-              <a:t>•  Añade manejo con recvuntil para sincronizar con un prompt del programa.</a:t>
-            </a:r>
-          </a:p>
-          <a:p>
-            <a:pPr>
-              <a:spcAft>
-                <a:spcPts val="600"/>
-              </a:spcAft>
-            </a:pPr>
-            <a:r>
-              <a:rPr sz="1500">
-                <a:solidFill>
-                  <a:srgbClr val="22282E"/>
-                </a:solidFill>
-              </a:rPr>
-              <a:t>•  Modifica el binario para que win reciba un argumento y pásalo vía registro/stack.</a:t>
-            </a:r>
-          </a:p>
-          <a:p>
-            <a:pPr>
-              <a:spcAft>
-                <a:spcPts val="600"/>
-              </a:spcAft>
-            </a:pPr>
-            <a:r>
-              <a:rPr sz="1500">
-                <a:solidFill>
-                  <a:srgbClr val="22282E"/>
-                </a:solidFill>
-              </a:rPr>
-              <a:t>•  Explica por qué el gadget ret corrige la alineación.</a:t>
-            </a:r>
-          </a:p>
-          <a:p>
-            <a:pPr>
-              <a:spcAft>
-                <a:spcPts val="600"/>
-              </a:spcAft>
-            </a:pPr>
-            <a:r>
-              <a:rPr sz="1500">
-                <a:solidFill>
-                  <a:srgbClr val="22282E"/>
-                </a:solidFill>
-              </a:rPr>
-              <a:t>•  Convierte el exploit local a remote("127.0.0.1", 1337) sirviendo el binario con socat.</a:t>
+              <a:t>•  Usa el vuln de las clases 118-119 (compilado con -fno-stack-protector -no-pie).</a:t>
             </a:r>
           </a:p>
         </p:txBody>
@@ -4763,7 +5124,7 @@
                   <a:srgbClr val="0B3D2E"/>
                 </a:solidFill>
               </a:rPr>
-              <a:t>📝 Reto verificable</a:t>
+              <a:t>🧪 Laboratorio guiado</a:t>
             </a:r>
           </a:p>
         </p:txBody>
@@ -4801,52 +5162,97 @@
                   <a:srgbClr val="22282E"/>
                 </a:solidFill>
               </a:rPr>
-              <a:t>•  Entrega exploit.py que, contra tu binario vuln, imprima la salida de win() de forma fiable en</a:t>
-            </a:r>
-          </a:p>
-          <a:p>
-            <a:pPr>
-              <a:spcAft>
-                <a:spcPts val="600"/>
-              </a:spcAft>
-            </a:pPr>
-            <a:r>
-              <a:rPr sz="1500">
-                <a:solidFill>
-                  <a:srgbClr val="22282E"/>
-                </a:solidFill>
-              </a:rPr>
-              <a:t>•  al menos 5 ejecuciones seguidas.</a:t>
-            </a:r>
-          </a:p>
-          <a:p>
-            <a:pPr>
-              <a:spcAft>
-                <a:spcPts val="600"/>
-              </a:spcAft>
-            </a:pPr>
-            <a:r>
-              <a:rPr sz="1500">
-                <a:solidFill>
-                  <a:srgbClr val="22282E"/>
-                </a:solidFill>
-              </a:rPr>
-              <a:t>•  Criterio de aceptación: for i in $(seq 5); do python3 exploit.py; done muestra el mensaje de</a:t>
-            </a:r>
-          </a:p>
-          <a:p>
-            <a:pPr>
-              <a:spcAft>
-                <a:spcPts val="600"/>
-              </a:spcAft>
-            </a:pPr>
-            <a:r>
-              <a:rPr sz="1500">
-                <a:solidFill>
-                  <a:srgbClr val="22282E"/>
-                </a:solidFill>
-              </a:rPr>
-              <a:t>•  win() las 5 veces, sin segfaults.</a:t>
+              <a:t>•  Confirma el offset con pwndbg (cyclic 200 → cyclic -l &lt;valor&gt;). Supón que es 72.</a:t>
+            </a:r>
+          </a:p>
+          <a:p>
+            <a:pPr>
+              <a:spcAft>
+                <a:spcPts val="600"/>
+              </a:spcAft>
+            </a:pPr>
+            <a:r>
+              <a:rPr sz="1500">
+                <a:solidFill>
+                  <a:srgbClr val="22282E"/>
+                </a:solidFill>
+              </a:rPr>
+              <a:t>•  Averigua la dirección de win: objdump -d vuln | grep '&lt;win&gt;:' o en pwntools elf.symbols.win.</a:t>
+            </a:r>
+          </a:p>
+          <a:p>
+            <a:pPr>
+              <a:spcAft>
+                <a:spcPts val="600"/>
+              </a:spcAft>
+            </a:pPr>
+            <a:r>
+              <a:rPr sz="1500">
+                <a:solidFill>
+                  <a:srgbClr val="22282E"/>
+                </a:solidFill>
+              </a:rPr>
+              <a:t>•  Prueba el payload manual:</a:t>
+            </a:r>
+          </a:p>
+          <a:p>
+            <a:pPr>
+              <a:spcAft>
+                <a:spcPts val="600"/>
+              </a:spcAft>
+            </a:pPr>
+            <a:r>
+              <a:rPr sz="1500">
+                <a:solidFill>
+                  <a:srgbClr val="22282E"/>
+                </a:solidFill>
+              </a:rPr>
+              <a:t>•  Escríbelo en pwntools (exploit.py):</a:t>
+            </a:r>
+          </a:p>
+          <a:p>
+            <a:pPr>
+              <a:spcAft>
+                <a:spcPts val="600"/>
+              </a:spcAft>
+            </a:pPr>
+            <a:r>
+              <a:rPr sz="1500">
+                <a:solidFill>
+                  <a:srgbClr val="22282E"/>
+                </a:solidFill>
+              </a:rPr>
+              <a:t>•  Si crashea justo al entrar en win, es alineación: inserta un gadget ret antes de la dirección:</a:t>
+            </a:r>
+          </a:p>
+          <a:p>
+            <a:pPr>
+              <a:spcAft>
+                <a:spcPts val="600"/>
+              </a:spcAft>
+            </a:pPr>
+            <a:r>
+              <a:rPr sz="1500">
+                <a:solidFill>
+                  <a:srgbClr val="22282E"/>
+                </a:solidFill>
+              </a:rPr>
+              <a:t>•  Depura acoplando GDB: cambia process(...) por gdb.debug("./vuln", "break win") y observa RIP.</a:t>
+            </a:r>
+          </a:p>
+          <a:p>
+            <a:pPr>
+              <a:spcAft>
+                <a:spcPts val="600"/>
+              </a:spcAft>
+            </a:pPr>
+            <a:r>
+              <a:rPr sz="1500">
+                <a:solidFill>
+                  <a:srgbClr val="22282E"/>
+                </a:solidFill>
+              </a:rPr>
+              <a:t>•  Cuando funcione, verás el mensaje de win() (control de flujo logrado).</a:t>
             </a:r>
           </a:p>
         </p:txBody>
